--- a/dataset/guides_final/ACC/guide/IT-ACC-003_MFA 인증 오류 대응 가이드.pptx
+++ b/dataset/guides_final/ACC/guide/IT-ACC-003_MFA 인증 오류 대응 가이드.pptx
@@ -3242,7 +3242,7 @@
                 <a:ea typeface="Malgun Gothic"/>
                 <a:cs typeface="Malgun Gothic"/>
               </a:rPr>
-              <a:t>한화시스템 ICT 임직원 IT 안내 · 계정·로그인</a:t>
+              <a:t>가상 ICT 기업 임직원 IT 안내 · 계정·로그인</a:t>
             </a:r>
           </a:p>
         </p:txBody>
@@ -3474,7 +3474,7 @@
                 <a:ea typeface="Malgun Gothic"/>
                 <a:cs typeface="Malgun Gothic"/>
               </a:rPr>
-              <a:t>© HANWHA SYSTEMS ICT · IT-ACC-003 · 사내 일반</a:t>
+              <a:t>© 가상 ICT 기업 · IT-ACC-003 · 사내 일반</a:t>
             </a:r>
           </a:p>
         </p:txBody>
@@ -5448,7 +5448,7 @@
                 <a:ea typeface="Malgun Gothic"/>
                 <a:cs typeface="Malgun Gothic"/>
               </a:rPr>
-              <a:t>© HANWHA SYSTEMS ICT · IT-ACC-003 · 사내 일반</a:t>
+              <a:t>© 가상 ICT 기업 · IT-ACC-003 · 사내 일반</a:t>
             </a:r>
           </a:p>
         </p:txBody>
@@ -7614,7 +7614,7 @@
                 <a:ea typeface="Malgun Gothic"/>
                 <a:cs typeface="Malgun Gothic"/>
               </a:rPr>
-              <a:t>© HANWHA SYSTEMS ICT · IT-ACC-003 · 사내 일반</a:t>
+              <a:t>© 가상 ICT 기업 · IT-ACC-003 · 사내 일반</a:t>
             </a:r>
           </a:p>
         </p:txBody>
@@ -8932,7 +8932,7 @@
                 <a:ea typeface="Malgun Gothic"/>
                 <a:cs typeface="Malgun Gothic"/>
               </a:rPr>
-              <a:t>© HANWHA SYSTEMS ICT · IT-ACC-003 · 사내 일반</a:t>
+              <a:t>© 가상 ICT 기업 · IT-ACC-003 · 사내 일반</a:t>
             </a:r>
           </a:p>
         </p:txBody>
@@ -10984,7 +10984,7 @@
                 <a:ea typeface="Malgun Gothic"/>
                 <a:cs typeface="Malgun Gothic"/>
               </a:rPr>
-              <a:t>© HANWHA SYSTEMS ICT · IT-ACC-003 · 사내 일반</a:t>
+              <a:t>© 가상 ICT 기업 · IT-ACC-003 · 사내 일반</a:t>
             </a:r>
           </a:p>
         </p:txBody>
@@ -12420,7 +12420,7 @@
                 <a:ea typeface="Malgun Gothic"/>
                 <a:cs typeface="Malgun Gothic"/>
               </a:rPr>
-              <a:t>© HANWHA SYSTEMS ICT · IT-ACC-003 · 사내 일반</a:t>
+              <a:t>© 가상 ICT 기업 · IT-ACC-003 · 사내 일반</a:t>
             </a:r>
           </a:p>
         </p:txBody>
@@ -14144,7 +14144,7 @@
                 <a:ea typeface="Malgun Gothic"/>
                 <a:cs typeface="Malgun Gothic"/>
               </a:rPr>
-              <a:t>HanwhaSystems · 내 사번</a:t>
+              <a:t>가상 ICT 기업 · 내 사번</a:t>
             </a:r>
             <a:r>
               <a:rPr sz="1150" b="0">
@@ -14155,7 +14155,7 @@
                 <a:ea typeface="Malgun Gothic"/>
                 <a:cs typeface="Malgun Gothic"/>
               </a:rPr>
-              <a:t> 항목의</a:t>
+              <a:t> 항목의 번호인지</a:t>
             </a:r>
           </a:p>
           <a:p>
@@ -14179,7 +14179,7 @@
                 <a:ea typeface="Malgun Gothic"/>
                 <a:cs typeface="Malgun Gothic"/>
               </a:rPr>
-              <a:t>번호인지 확인합니다.</a:t>
+              <a:t>확인합니다.</a:t>
             </a:r>
           </a:p>
         </p:txBody>
@@ -14459,7 +14459,7 @@
                 <a:ea typeface="Malgun Gothic"/>
                 <a:cs typeface="Malgun Gothic"/>
               </a:rPr>
-              <a:t>© HANWHA SYSTEMS ICT · IT-ACC-003 · 사내 일반</a:t>
+              <a:t>© 가상 ICT 기업 · IT-ACC-003 · 사내 일반</a:t>
             </a:r>
           </a:p>
         </p:txBody>
@@ -15823,7 +15823,7 @@
                 <a:ea typeface="Malgun Gothic"/>
                 <a:cs typeface="Malgun Gothic"/>
               </a:rPr>
-              <a:t>© HANWHA SYSTEMS ICT · IT-ACC-003 · 사내 일반</a:t>
+              <a:t>© 가상 ICT 기업 · IT-ACC-003 · 사내 일반</a:t>
             </a:r>
           </a:p>
         </p:txBody>
@@ -17748,7 +17748,7 @@
                 <a:ea typeface="Malgun Gothic"/>
                 <a:cs typeface="Malgun Gothic"/>
               </a:rPr>
-              <a:t>© HANWHA SYSTEMS ICT · IT-ACC-003 · 사내 일반</a:t>
+              <a:t>© 가상 ICT 기업 · IT-ACC-003 · 사내 일반</a:t>
             </a:r>
           </a:p>
         </p:txBody>
@@ -19042,7 +19042,7 @@
                 <a:ea typeface="Malgun Gothic"/>
                 <a:cs typeface="Malgun Gothic"/>
               </a:rPr>
-              <a:t>© HANWHA SYSTEMS ICT · IT-ACC-003 · 사내 일반</a:t>
+              <a:t>© 가상 ICT 기업 · IT-ACC-003 · 사내 일반</a:t>
             </a:r>
           </a:p>
         </p:txBody>
@@ -21048,7 +21048,7 @@
                 <a:ea typeface="Malgun Gothic"/>
                 <a:cs typeface="Malgun Gothic"/>
               </a:rPr>
-              <a:t>© HANWHA SYSTEMS ICT · IT-ACC-003 · 사내 일반</a:t>
+              <a:t>© 가상 ICT 기업 · IT-ACC-003 · 사내 일반</a:t>
             </a:r>
           </a:p>
         </p:txBody>
@@ -22853,7 +22853,7 @@
                 <a:ea typeface="Malgun Gothic"/>
                 <a:cs typeface="Malgun Gothic"/>
               </a:rPr>
-              <a:t>© HANWHA SYSTEMS ICT · IT-ACC-003 · 사내 일반</a:t>
+              <a:t>© 가상 ICT 기업 · IT-ACC-003 · 사내 일반</a:t>
             </a:r>
           </a:p>
         </p:txBody>
@@ -24356,7 +24356,7 @@
                 <a:ea typeface="Malgun Gothic"/>
                 <a:cs typeface="Malgun Gothic"/>
               </a:rPr>
-              <a:t>© HANWHA SYSTEMS ICT · IT-ACC-003 · 사내 일반</a:t>
+              <a:t>© 가상 ICT 기업 · IT-ACC-003 · 사내 일반</a:t>
             </a:r>
           </a:p>
         </p:txBody>
@@ -24604,7 +24604,7 @@
                 <a:ea typeface="Malgun Gothic"/>
                 <a:cs typeface="Malgun Gothic"/>
               </a:rPr>
-              <a:t>© HANWHA SYSTEMS ICT · IT-ACC-003 · 사내 일반</a:t>
+              <a:t>© 가상 ICT 기업 · IT-ACC-003 · 사내 일반</a:t>
             </a:r>
           </a:p>
         </p:txBody>
@@ -25497,7 +25497,7 @@
                 <a:ea typeface="Malgun Gothic"/>
                 <a:cs typeface="Malgun Gothic"/>
               </a:rPr>
-              <a:t>© HANWHA SYSTEMS ICT · IT-ACC-003 · 사내 일반</a:t>
+              <a:t>© 가상 ICT 기업 · IT-ACC-003 · 사내 일반</a:t>
             </a:r>
           </a:p>
         </p:txBody>
@@ -25745,7 +25745,7 @@
                 <a:ea typeface="Malgun Gothic"/>
                 <a:cs typeface="Malgun Gothic"/>
               </a:rPr>
-              <a:t>© HANWHA SYSTEMS ICT · IT-ACC-003 · 사내 일반</a:t>
+              <a:t>© 가상 ICT 기업 · IT-ACC-003 · 사내 일반</a:t>
             </a:r>
           </a:p>
         </p:txBody>
@@ -26496,7 +26496,7 @@
                 <a:ea typeface="Malgun Gothic"/>
                 <a:cs typeface="Malgun Gothic"/>
               </a:rPr>
-              <a:t>© HANWHA SYSTEMS ICT · IT-ACC-003 · 사내 일반</a:t>
+              <a:t>© 가상 ICT 기업 · IT-ACC-003 · 사내 일반</a:t>
             </a:r>
           </a:p>
         </p:txBody>
@@ -26744,7 +26744,7 @@
                 <a:ea typeface="Malgun Gothic"/>
                 <a:cs typeface="Malgun Gothic"/>
               </a:rPr>
-              <a:t>© HANWHA SYSTEMS ICT · IT-ACC-003 · 사내 일반</a:t>
+              <a:t>© 가상 ICT 기업 · IT-ACC-003 · 사내 일반</a:t>
             </a:r>
           </a:p>
         </p:txBody>
@@ -27256,7 +27256,7 @@
                           <a:ea typeface="Malgun Gothic"/>
                           <a:cs typeface="Malgun Gothic"/>
                         </a:rPr>
-                        <a:t>사내 IT 포털(hanwha-admin) 상단 [챗봇 문의]</a:t>
+                        <a:t>사내 IT 포털 상단 [챗봇 문의]</a:t>
                       </a:r>
                     </a:p>
                   </a:txBody>
@@ -27948,7 +27948,7 @@
                           <a:ea typeface="Malgun Gothic"/>
                           <a:cs typeface="Malgun Gothic"/>
                         </a:rPr>
-                        <a:t>it-helpdesk@hanwha-ict.example</a:t>
+                        <a:t>it-helpdesk@ict.example</a:t>
                       </a:r>
                     </a:p>
                   </a:txBody>
@@ -28247,7 +28247,7 @@
                 <a:ea typeface="Malgun Gothic"/>
                 <a:cs typeface="Malgun Gothic"/>
               </a:rPr>
-              <a:t>© HANWHA SYSTEMS ICT · IT-ACC-003 · 사내 일반</a:t>
+              <a:t>© 가상 ICT 기업 · IT-ACC-003 · 사내 일반</a:t>
             </a:r>
           </a:p>
         </p:txBody>
@@ -28495,7 +28495,7 @@
                 <a:ea typeface="Malgun Gothic"/>
                 <a:cs typeface="Malgun Gothic"/>
               </a:rPr>
-              <a:t>© HANWHA SYSTEMS ICT · IT-ACC-003 · 사내 일반</a:t>
+              <a:t>© 가상 ICT 기업 · IT-ACC-003 · 사내 일반</a:t>
             </a:r>
           </a:p>
         </p:txBody>
@@ -30320,7 +30320,7 @@
                 <a:ea typeface="Malgun Gothic"/>
                 <a:cs typeface="Malgun Gothic"/>
               </a:rPr>
-              <a:t>© HANWHA SYSTEMS ICT · IT-ACC-003 · 사내 일반</a:t>
+              <a:t>© 가상 ICT 기업 · IT-ACC-003 · 사내 일반</a:t>
             </a:r>
           </a:p>
         </p:txBody>
@@ -31765,7 +31765,7 @@
                 <a:ea typeface="Malgun Gothic"/>
                 <a:cs typeface="Malgun Gothic"/>
               </a:rPr>
-              <a:t>© HANWHA SYSTEMS ICT · IT-ACC-003 · 사내 일반</a:t>
+              <a:t>© 가상 ICT 기업 · IT-ACC-003 · 사내 일반</a:t>
             </a:r>
           </a:p>
         </p:txBody>
@@ -33041,7 +33041,7 @@
                 <a:ea typeface="Malgun Gothic"/>
                 <a:cs typeface="Malgun Gothic"/>
               </a:rPr>
-              <a:t>© HANWHA SYSTEMS ICT · IT-ACC-003 · 사내 일반</a:t>
+              <a:t>© 가상 ICT 기업 · IT-ACC-003 · 사내 일반</a:t>
             </a:r>
           </a:p>
         </p:txBody>
@@ -33289,7 +33289,7 @@
                 <a:ea typeface="Malgun Gothic"/>
                 <a:cs typeface="Malgun Gothic"/>
               </a:rPr>
-              <a:t>© HANWHA SYSTEMS ICT · IT-ACC-003 · 사내 일반</a:t>
+              <a:t>© 가상 ICT 기업 · IT-ACC-003 · 사내 일반</a:t>
             </a:r>
           </a:p>
         </p:txBody>
@@ -34819,7 +34819,7 @@
                 <a:ea typeface="Malgun Gothic"/>
                 <a:cs typeface="Malgun Gothic"/>
               </a:rPr>
-              <a:t>© HANWHA SYSTEMS ICT · IT-ACC-003 · 사내 일반</a:t>
+              <a:t>© 가상 ICT 기업 · IT-ACC-003 · 사내 일반</a:t>
             </a:r>
           </a:p>
         </p:txBody>
@@ -35067,7 +35067,7 @@
                 <a:ea typeface="Malgun Gothic"/>
                 <a:cs typeface="Malgun Gothic"/>
               </a:rPr>
-              <a:t>© HANWHA SYSTEMS ICT · IT-ACC-003 · 사내 일반</a:t>
+              <a:t>© 가상 ICT 기업 · IT-ACC-003 · 사내 일반</a:t>
             </a:r>
           </a:p>
         </p:txBody>
@@ -37056,7 +37056,7 @@
                 <a:ea typeface="Malgun Gothic"/>
                 <a:cs typeface="Malgun Gothic"/>
               </a:rPr>
-              <a:t>© HANWHA SYSTEMS ICT · IT-ACC-003 · 사내 일반</a:t>
+              <a:t>© 가상 ICT 기업 · IT-ACC-003 · 사내 일반</a:t>
             </a:r>
           </a:p>
         </p:txBody>
@@ -38749,7 +38749,7 @@
                 <a:ea typeface="Malgun Gothic"/>
                 <a:cs typeface="Malgun Gothic"/>
               </a:rPr>
-              <a:t>© HANWHA SYSTEMS ICT · IT-ACC-003 · 사내 일반</a:t>
+              <a:t>© 가상 ICT 기업 · IT-ACC-003 · 사내 일반</a:t>
             </a:r>
           </a:p>
         </p:txBody>
@@ -38997,7 +38997,7 @@
                 <a:ea typeface="Malgun Gothic"/>
                 <a:cs typeface="Malgun Gothic"/>
               </a:rPr>
-              <a:t>© HANWHA SYSTEMS ICT · IT-ACC-003 · 사내 일반</a:t>
+              <a:t>© 가상 ICT 기업 · IT-ACC-003 · 사내 일반</a:t>
             </a:r>
           </a:p>
         </p:txBody>
